--- a/Schools_ML_Track/camp_2026/slides/DA/DA13.pptx
+++ b/Schools_ML_Track/camp_2026/slides/DA/DA13.pptx
@@ -128,7 +128,7 @@
   <p:extLst>
     <p:ext uri="{521415D9-36F7-43E2-AB2F-B90AF26B5E84}">
       <p14:sectionLst xmlns:p14="http://schemas.microsoft.com/office/powerpoint/2010/main">
-        <p14:section name="Opening" id="{18f096ca-ccd4-d8dd-810c-81213113279b}">
+        <p14:section name="Opening" id="{c62c2a87-1451-c90e-0dee-b8fa8e8717d6}">
           <p14:sldIdLst>
             <p14:sldId id="256"/>
             <p14:sldId id="257"/>
@@ -139,7 +139,7 @@
             <p14:sldId id="262"/>
           </p14:sldIdLst>
         </p14:section>
-        <p14:section name="Block A" id="{2b7fba36-aaab-f3fc-c39c-741fc5ce0777}">
+        <p14:section name="Block A" id="{a4daad22-7c33-b825-8408-0e94be1ec5b6}">
           <p14:sldIdLst>
             <p14:sldId id="263"/>
             <p14:sldId id="264"/>
@@ -149,15 +149,15 @@
             <p14:sldId id="269"/>
           </p14:sldIdLst>
         </p14:section>
-        <p14:section name="Break" id="{880e2fb7-7ca8-c775-f339-7682297228f2}">
+        <p14:section name="Break" id="{a431ba07-918f-85c3-d99a-587eb54cb947}">
           <p14:sldIdLst>
             <p14:sldId id="267"/>
           </p14:sldIdLst>
         </p14:section>
-        <p14:section name="Block A" id="{e2c004ca-1965-42b9-da90-a35a31af28c8}">
+        <p14:section name="Block A" id="{617d10bd-0047-6cfe-90e6-34a993b4f1fa}">
           <p14:sldIdLst/>
         </p14:section>
-        <p14:section name="Block B" id="{565253b1-4620-2b0d-8185-0e60b27de1af}">
+        <p14:section name="Block B" id="{ac2db2ee-2980-2c62-2a1e-d3c0d60fb53b}">
           <p14:sldIdLst>
             <p14:sldId id="270"/>
             <p14:sldId id="271"/>
@@ -166,7 +166,7 @@
             <p14:sldId id="274"/>
           </p14:sldIdLst>
         </p14:section>
-        <p14:section name="Make and close" id="{5388bd13-7e4c-0251-e837-8d390cc6762c}">
+        <p14:section name="Make and close" id="{37199326-0eed-ae67-7e62-cba3a2192914}">
           <p14:sldIdLst>
             <p14:sldId id="275"/>
             <p14:sldId id="276"/>

--- a/Schools_ML_Track/camp_2026/slides/DA/DA13.pptx
+++ b/Schools_ML_Track/camp_2026/slides/DA/DA13.pptx
@@ -128,7 +128,7 @@
   <p:extLst>
     <p:ext uri="{521415D9-36F7-43E2-AB2F-B90AF26B5E84}">
       <p14:sectionLst xmlns:p14="http://schemas.microsoft.com/office/powerpoint/2010/main">
-        <p14:section name="Opening" id="{c62c2a87-1451-c90e-0dee-b8fa8e8717d6}">
+        <p14:section name="Opening" id="{9de38ba1-9bf1-5813-2c27-0356d4e532a4}">
           <p14:sldIdLst>
             <p14:sldId id="256"/>
             <p14:sldId id="257"/>
@@ -139,7 +139,7 @@
             <p14:sldId id="262"/>
           </p14:sldIdLst>
         </p14:section>
-        <p14:section name="Block A" id="{a4daad22-7c33-b825-8408-0e94be1ec5b6}">
+        <p14:section name="Block A" id="{5aa5f298-874e-a8be-81ca-9256fbfa98f3}">
           <p14:sldIdLst>
             <p14:sldId id="263"/>
             <p14:sldId id="264"/>
@@ -149,15 +149,15 @@
             <p14:sldId id="269"/>
           </p14:sldIdLst>
         </p14:section>
-        <p14:section name="Break" id="{a431ba07-918f-85c3-d99a-587eb54cb947}">
+        <p14:section name="Break" id="{b18f290a-3f17-e0bd-4407-9b58e888e93b}">
           <p14:sldIdLst>
             <p14:sldId id="267"/>
           </p14:sldIdLst>
         </p14:section>
-        <p14:section name="Block A" id="{617d10bd-0047-6cfe-90e6-34a993b4f1fa}">
+        <p14:section name="Block A" id="{14dd013d-f746-876a-a4e1-64bfbc1e95db}">
           <p14:sldIdLst/>
         </p14:section>
-        <p14:section name="Block B" id="{ac2db2ee-2980-2c62-2a1e-d3c0d60fb53b}">
+        <p14:section name="Block B" id="{7e88b7d0-9be6-3cc9-7133-307142ec753a}">
           <p14:sldIdLst>
             <p14:sldId id="270"/>
             <p14:sldId id="271"/>
@@ -166,7 +166,7 @@
             <p14:sldId id="274"/>
           </p14:sldIdLst>
         </p14:section>
-        <p14:section name="Make and close" id="{37199326-0eed-ae67-7e62-cba3a2192914}">
+        <p14:section name="Make and close" id="{398c0a5d-509a-7899-abc4-b239ca1781ad}">
           <p14:sldIdLst>
             <p14:sldId id="275"/>
             <p14:sldId id="276"/>
@@ -3197,7 +3197,24 @@
                 <a:ea typeface="Lato" pitchFamily="34" charset="-122"/>
                 <a:cs typeface="Lato" pitchFamily="34" charset="-120"/>
               </a:rPr>
-              <a:t>NumPy: the numbers underneath pandas</a:t>
+              <a:t>NumPy: the numbers</a:t>
+            </a:r>
+            <a:endParaRPr lang="en-US" sz="5600" dirty="0"/>
+          </a:p>
+          <a:p>
+            <a:pPr algn="l" indent="0" marL="0">
+              <a:buNone/>
+            </a:pPr>
+            <a:r>
+              <a:rPr lang="en-US" sz="5600" b="1" dirty="0">
+                <a:solidFill>
+                  <a:srgbClr val="FFFFFF"/>
+                </a:solidFill>
+                <a:latin typeface="Lato" pitchFamily="34" charset="0"/>
+                <a:ea typeface="Lato" pitchFamily="34" charset="-122"/>
+                <a:cs typeface="Lato" pitchFamily="34" charset="-120"/>
+              </a:rPr>
+              <a:t>underneath pandas</a:t>
             </a:r>
             <a:endParaRPr lang="en-US" sz="5600" dirty="0"/>
           </a:p>
@@ -4377,11 +4394,11 @@
         <p:spPr>
           <a:xfrm>
             <a:off x="640080" y="1645920"/>
-            <a:ext cx="10881360" cy="3383280"/>
+            <a:ext cx="10881360" cy="2948432"/>
           </a:xfrm>
           <a:prstGeom prst="roundRect">
             <a:avLst>
-              <a:gd name="adj" fmla="val 2162"/>
+              <a:gd name="adj" fmla="val 2481"/>
             </a:avLst>
           </a:prstGeom>
           <a:solidFill>
@@ -4399,7 +4416,7 @@
         <p:spPr>
           <a:xfrm>
             <a:off x="841248" y="1847088"/>
-            <a:ext cx="10479024" cy="2980944"/>
+            <a:ext cx="10479024" cy="2546096"/>
           </a:xfrm>
           <a:prstGeom prst="rect">
             <a:avLst/>
@@ -4413,12 +4430,12 @@
           <a:p>
             <a:pPr algn="l" indent="0" marL="0">
               <a:lnSpc>
-                <a:spcPts val="2340"/>
-              </a:lnSpc>
-              <a:buNone/>
-            </a:pPr>
-            <a:r>
-              <a:rPr lang="en-US" sz="1800" dirty="0">
+                <a:spcPts val="2470"/>
+              </a:lnSpc>
+              <a:buNone/>
+            </a:pPr>
+            <a:r>
+              <a:rPr lang="en-US" sz="1900" dirty="0">
                 <a:solidFill>
                   <a:srgbClr val="FFFFFF"/>
                 </a:solidFill>
@@ -4430,12 +4447,12 @@
             </a:r>
             <a:pPr algn="l" indent="0" marL="0">
               <a:lnSpc>
-                <a:spcPts val="2340"/>
-              </a:lnSpc>
-              <a:buNone/>
-            </a:pPr>
-            <a:r>
-              <a:rPr lang="en-US" sz="1800" dirty="0">
+                <a:spcPts val="2470"/>
+              </a:lnSpc>
+              <a:buNone/>
+            </a:pPr>
+            <a:r>
+              <a:rPr lang="en-US" sz="1900" dirty="0">
                 <a:solidFill>
                   <a:srgbClr val="E0BE36"/>
                 </a:solidFill>
@@ -4447,12 +4464,12 @@
             </a:r>
             <a:pPr algn="l" indent="0" marL="0">
               <a:lnSpc>
-                <a:spcPts val="2340"/>
-              </a:lnSpc>
-              <a:buNone/>
-            </a:pPr>
-            <a:r>
-              <a:rPr lang="en-US" sz="1800" dirty="0">
+                <a:spcPts val="2470"/>
+              </a:lnSpc>
+              <a:buNone/>
+            </a:pPr>
+            <a:r>
+              <a:rPr lang="en-US" sz="1900" dirty="0">
                 <a:solidFill>
                   <a:srgbClr val="FFFFFF"/>
                 </a:solidFill>
@@ -4462,17 +4479,17 @@
               </a:rPr>
               <a:t>)</a:t>
             </a:r>
-            <a:endParaRPr lang="en-US" sz="1800" dirty="0"/>
-          </a:p>
-          <a:p>
-            <a:pPr algn="l" indent="0" marL="0">
-              <a:lnSpc>
-                <a:spcPts val="2340"/>
-              </a:lnSpc>
-              <a:buNone/>
-            </a:pPr>
-            <a:r>
-              <a:rPr lang="en-US" sz="1800" dirty="0">
+            <a:endParaRPr lang="en-US" sz="1900" dirty="0"/>
+          </a:p>
+          <a:p>
+            <a:pPr algn="l" indent="0" marL="0">
+              <a:lnSpc>
+                <a:spcPts val="2470"/>
+              </a:lnSpc>
+              <a:buNone/>
+            </a:pPr>
+            <a:r>
+              <a:rPr lang="en-US" sz="1900" dirty="0">
                 <a:solidFill>
                   <a:srgbClr val="FFFFFF"/>
                 </a:solidFill>
@@ -4480,87 +4497,87 @@
                 <a:ea typeface="Courier New" pitchFamily="34" charset="-122"/>
                 <a:cs typeface="Courier New" pitchFamily="34" charset="-120"/>
               </a:rPr>
-              <a:t>values = (</a:t>
-            </a:r>
-            <a:endParaRPr lang="en-US" sz="1800" dirty="0"/>
-          </a:p>
-          <a:p>
-            <a:pPr algn="l" indent="0" marL="0">
-              <a:lnSpc>
-                <a:spcPts val="2340"/>
-              </a:lnSpc>
-              <a:buNone/>
-            </a:pPr>
-            <a:r>
-              <a:rPr lang="en-US" sz="1800" dirty="0">
-                <a:solidFill>
-                  <a:srgbClr val="FFFFFF"/>
+              <a:t>values = (sunrise[</a:t>
+            </a:r>
+            <a:pPr algn="l" indent="0" marL="0">
+              <a:lnSpc>
+                <a:spcPts val="2470"/>
+              </a:lnSpc>
+              <a:buNone/>
+            </a:pPr>
+            <a:r>
+              <a:rPr lang="en-US" sz="1900" dirty="0">
+                <a:solidFill>
+                  <a:srgbClr val="E0BE36"/>
                 </a:solidFill>
                 <a:latin typeface="Courier New" pitchFamily="34" charset="0"/>
                 <a:ea typeface="Courier New" pitchFamily="34" charset="-122"/>
                 <a:cs typeface="Courier New" pitchFamily="34" charset="-120"/>
               </a:rPr>
-              <a:t>    sunrise[</a:t>
-            </a:r>
-            <a:pPr algn="l" indent="0" marL="0">
-              <a:lnSpc>
-                <a:spcPts val="2340"/>
-              </a:lnSpc>
-              <a:buNone/>
-            </a:pPr>
-            <a:r>
-              <a:rPr lang="en-US" sz="1800" dirty="0">
-                <a:solidFill>
-                  <a:srgbClr val="E0BE36"/>
+              <a:t>"units"</a:t>
+            </a:r>
+            <a:pPr algn="l" indent="0" marL="0">
+              <a:lnSpc>
+                <a:spcPts val="2470"/>
+              </a:lnSpc>
+              <a:buNone/>
+            </a:pPr>
+            <a:r>
+              <a:rPr lang="en-US" sz="1900" dirty="0">
+                <a:solidFill>
+                  <a:srgbClr val="FFFFFF"/>
                 </a:solidFill>
                 <a:latin typeface="Courier New" pitchFamily="34" charset="0"/>
                 <a:ea typeface="Courier New" pitchFamily="34" charset="-122"/>
                 <a:cs typeface="Courier New" pitchFamily="34" charset="-120"/>
               </a:rPr>
-              <a:t>"units"</a:t>
-            </a:r>
-            <a:pPr algn="l" indent="0" marL="0">
-              <a:lnSpc>
-                <a:spcPts val="2340"/>
-              </a:lnSpc>
-              <a:buNone/>
-            </a:pPr>
-            <a:r>
-              <a:rPr lang="en-US" sz="1800" dirty="0">
-                <a:solidFill>
-                  <a:srgbClr val="FFFFFF"/>
+              <a:t>] * sunrise[</a:t>
+            </a:r>
+            <a:pPr algn="l" indent="0" marL="0">
+              <a:lnSpc>
+                <a:spcPts val="2470"/>
+              </a:lnSpc>
+              <a:buNone/>
+            </a:pPr>
+            <a:r>
+              <a:rPr lang="en-US" sz="1900" dirty="0">
+                <a:solidFill>
+                  <a:srgbClr val="E0BE36"/>
                 </a:solidFill>
                 <a:latin typeface="Courier New" pitchFamily="34" charset="0"/>
                 <a:ea typeface="Courier New" pitchFamily="34" charset="-122"/>
                 <a:cs typeface="Courier New" pitchFamily="34" charset="-120"/>
               </a:rPr>
-              <a:t>] * sunrise[</a:t>
-            </a:r>
-            <a:pPr algn="l" indent="0" marL="0">
-              <a:lnSpc>
-                <a:spcPts val="2340"/>
-              </a:lnSpc>
-              <a:buNone/>
-            </a:pPr>
-            <a:r>
-              <a:rPr lang="en-US" sz="1800" dirty="0">
-                <a:solidFill>
-                  <a:srgbClr val="E0BE36"/>
+              <a:t>"unit_price_ugx"</a:t>
+            </a:r>
+            <a:pPr algn="l" indent="0" marL="0">
+              <a:lnSpc>
+                <a:spcPts val="2470"/>
+              </a:lnSpc>
+              <a:buNone/>
+            </a:pPr>
+            <a:r>
+              <a:rPr lang="en-US" sz="1900" dirty="0">
+                <a:solidFill>
+                  <a:srgbClr val="FFFFFF"/>
                 </a:solidFill>
                 <a:latin typeface="Courier New" pitchFamily="34" charset="0"/>
                 <a:ea typeface="Courier New" pitchFamily="34" charset="-122"/>
                 <a:cs typeface="Courier New" pitchFamily="34" charset="-120"/>
               </a:rPr>
-              <a:t>"unit_price_ugx"</a:t>
-            </a:r>
-            <a:pPr algn="l" indent="0" marL="0">
-              <a:lnSpc>
-                <a:spcPts val="2340"/>
-              </a:lnSpc>
-              <a:buNone/>
-            </a:pPr>
-            <a:r>
-              <a:rPr lang="en-US" sz="1800" dirty="0">
+              <a:t>]).to_numpy()</a:t>
+            </a:r>
+            <a:endParaRPr lang="en-US" sz="1900" dirty="0"/>
+          </a:p>
+          <a:p>
+            <a:pPr algn="l" indent="0" marL="0">
+              <a:lnSpc>
+                <a:spcPts val="2470"/>
+              </a:lnSpc>
+              <a:buNone/>
+            </a:pPr>
+            <a:r>
+              <a:rPr lang="en-US" sz="1900" dirty="0">
                 <a:solidFill>
                   <a:srgbClr val="FFFFFF"/>
                 </a:solidFill>
@@ -4568,19 +4585,19 @@
                 <a:ea typeface="Courier New" pitchFamily="34" charset="-122"/>
                 <a:cs typeface="Courier New" pitchFamily="34" charset="-120"/>
               </a:rPr>
-              <a:t>]</a:t>
-            </a:r>
-            <a:endParaRPr lang="en-US" sz="1800" dirty="0"/>
-          </a:p>
-          <a:p>
-            <a:pPr algn="l" indent="0" marL="0">
-              <a:lnSpc>
-                <a:spcPts val="2340"/>
-              </a:lnSpc>
-              <a:buNone/>
-            </a:pPr>
-            <a:r>
-              <a:rPr lang="en-US" sz="1800" dirty="0">
+              <a:t>q1, q3 = np.percentile(values, [25, 75])</a:t>
+            </a:r>
+            <a:endParaRPr lang="en-US" sz="1900" dirty="0"/>
+          </a:p>
+          <a:p>
+            <a:pPr algn="l" indent="0" marL="0">
+              <a:lnSpc>
+                <a:spcPts val="2470"/>
+              </a:lnSpc>
+              <a:buNone/>
+            </a:pPr>
+            <a:r>
+              <a:rPr lang="en-US" sz="1900" dirty="0">
                 <a:solidFill>
                   <a:srgbClr val="FFFFFF"/>
                 </a:solidFill>
@@ -4588,19 +4605,19 @@
                 <a:ea typeface="Courier New" pitchFamily="34" charset="-122"/>
                 <a:cs typeface="Courier New" pitchFamily="34" charset="-120"/>
               </a:rPr>
-              <a:t>).to_numpy()</a:t>
-            </a:r>
-            <a:endParaRPr lang="en-US" sz="1800" dirty="0"/>
-          </a:p>
-          <a:p>
-            <a:pPr algn="l" indent="0" marL="0">
-              <a:lnSpc>
-                <a:spcPts val="2340"/>
-              </a:lnSpc>
-              <a:buNone/>
-            </a:pPr>
-            <a:r>
-              <a:rPr lang="en-US" sz="1800" dirty="0">
+              <a:t>fence = q3 + 1.5 * (q3 - q1)</a:t>
+            </a:r>
+            <a:endParaRPr lang="en-US" sz="1900" dirty="0"/>
+          </a:p>
+          <a:p>
+            <a:pPr algn="l" indent="0" marL="0">
+              <a:lnSpc>
+                <a:spcPts val="2470"/>
+              </a:lnSpc>
+              <a:buNone/>
+            </a:pPr>
+            <a:r>
+              <a:rPr lang="en-US" sz="1900" dirty="0">
                 <a:solidFill>
                   <a:srgbClr val="FFFFFF"/>
                 </a:solidFill>
@@ -4608,19 +4625,19 @@
                 <a:ea typeface="Courier New" pitchFamily="34" charset="-122"/>
                 <a:cs typeface="Courier New" pitchFamily="34" charset="-120"/>
               </a:rPr>
-              <a:t>q1, q3 = np.percentile(values, [25, 75])</a:t>
-            </a:r>
-            <a:endParaRPr lang="en-US" sz="1800" dirty="0"/>
-          </a:p>
-          <a:p>
-            <a:pPr algn="l" indent="0" marL="0">
-              <a:lnSpc>
-                <a:spcPts val="2340"/>
-              </a:lnSpc>
-              <a:buNone/>
-            </a:pPr>
-            <a:r>
-              <a:rPr lang="en-US" sz="1800" dirty="0">
+              <a:t>big = values[values &gt; fence]</a:t>
+            </a:r>
+            <a:endParaRPr lang="en-US" sz="1900" dirty="0"/>
+          </a:p>
+          <a:p>
+            <a:pPr algn="l" indent="0" marL="0">
+              <a:lnSpc>
+                <a:spcPts val="2470"/>
+              </a:lnSpc>
+              <a:buNone/>
+            </a:pPr>
+            <a:r>
+              <a:rPr lang="en-US" sz="1900" dirty="0">
                 <a:solidFill>
                   <a:srgbClr val="FFFFFF"/>
                 </a:solidFill>
@@ -4628,19 +4645,19 @@
                 <a:ea typeface="Courier New" pitchFamily="34" charset="-122"/>
                 <a:cs typeface="Courier New" pitchFamily="34" charset="-120"/>
               </a:rPr>
-              <a:t>fence = q3 + 1.5 * (q3 - q1)</a:t>
-            </a:r>
-            <a:endParaRPr lang="en-US" sz="1800" dirty="0"/>
-          </a:p>
-          <a:p>
-            <a:pPr algn="l" indent="0" marL="0">
-              <a:lnSpc>
-                <a:spcPts val="2340"/>
-              </a:lnSpc>
-              <a:buNone/>
-            </a:pPr>
-            <a:r>
-              <a:rPr lang="en-US" sz="1800" dirty="0">
+              <a:t>print(q1, q3, fence)</a:t>
+            </a:r>
+            <a:endParaRPr lang="en-US" sz="1900" dirty="0"/>
+          </a:p>
+          <a:p>
+            <a:pPr algn="l" indent="0" marL="0">
+              <a:lnSpc>
+                <a:spcPts val="2470"/>
+              </a:lnSpc>
+              <a:buNone/>
+            </a:pPr>
+            <a:r>
+              <a:rPr lang="en-US" sz="1900" dirty="0">
                 <a:solidFill>
                   <a:srgbClr val="FFFFFF"/>
                 </a:solidFill>
@@ -4648,19 +4665,19 @@
                 <a:ea typeface="Courier New" pitchFamily="34" charset="-122"/>
                 <a:cs typeface="Courier New" pitchFamily="34" charset="-120"/>
               </a:rPr>
-              <a:t>big = values[values &gt; fence]</a:t>
-            </a:r>
-            <a:endParaRPr lang="en-US" sz="1800" dirty="0"/>
-          </a:p>
-          <a:p>
-            <a:pPr algn="l" indent="0" marL="0">
-              <a:lnSpc>
-                <a:spcPts val="2340"/>
-              </a:lnSpc>
-              <a:buNone/>
-            </a:pPr>
-            <a:r>
-              <a:rPr lang="en-US" sz="1800" dirty="0">
+              <a:t>print(len(big), big.max())</a:t>
+            </a:r>
+            <a:endParaRPr lang="en-US" sz="1900" dirty="0"/>
+          </a:p>
+          <a:p>
+            <a:pPr algn="l" indent="0" marL="0">
+              <a:lnSpc>
+                <a:spcPts val="2470"/>
+              </a:lnSpc>
+              <a:buNone/>
+            </a:pPr>
+            <a:r>
+              <a:rPr lang="en-US" sz="1900" dirty="0">
                 <a:solidFill>
                   <a:srgbClr val="FFFFFF"/>
                 </a:solidFill>
@@ -4668,49 +4685,9 @@
                 <a:ea typeface="Courier New" pitchFamily="34" charset="-122"/>
                 <a:cs typeface="Courier New" pitchFamily="34" charset="-120"/>
               </a:rPr>
-              <a:t>print(q1, q3, fence)</a:t>
-            </a:r>
-            <a:endParaRPr lang="en-US" sz="1800" dirty="0"/>
-          </a:p>
-          <a:p>
-            <a:pPr algn="l" indent="0" marL="0">
-              <a:lnSpc>
-                <a:spcPts val="2340"/>
-              </a:lnSpc>
-              <a:buNone/>
-            </a:pPr>
-            <a:r>
-              <a:rPr lang="en-US" sz="1800" dirty="0">
-                <a:solidFill>
-                  <a:srgbClr val="FFFFFF"/>
-                </a:solidFill>
-                <a:latin typeface="Courier New" pitchFamily="34" charset="0"/>
-                <a:ea typeface="Courier New" pitchFamily="34" charset="-122"/>
-                <a:cs typeface="Courier New" pitchFamily="34" charset="-120"/>
-              </a:rPr>
-              <a:t>print(len(big), big.max())</a:t>
-            </a:r>
-            <a:endParaRPr lang="en-US" sz="1800" dirty="0"/>
-          </a:p>
-          <a:p>
-            <a:pPr algn="l" indent="0" marL="0">
-              <a:lnSpc>
-                <a:spcPts val="2340"/>
-              </a:lnSpc>
-              <a:buNone/>
-            </a:pPr>
-            <a:r>
-              <a:rPr lang="en-US" sz="1800" dirty="0">
-                <a:solidFill>
-                  <a:srgbClr val="FFFFFF"/>
-                </a:solidFill>
-                <a:latin typeface="Courier New" pitchFamily="34" charset="0"/>
-                <a:ea typeface="Courier New" pitchFamily="34" charset="-122"/>
-                <a:cs typeface="Courier New" pitchFamily="34" charset="-120"/>
-              </a:rPr>
               <a:t>print(round(np.std(customers), 1))</a:t>
             </a:r>
-            <a:endParaRPr lang="en-US" sz="1800" dirty="0"/>
+            <a:endParaRPr lang="en-US" sz="1900" dirty="0"/>
           </a:p>
         </p:txBody>
       </p:sp>
@@ -4722,8 +4699,8 @@
         </p:nvSpPr>
         <p:spPr>
           <a:xfrm>
-            <a:off x="640080" y="5212080"/>
-            <a:ext cx="8046720" cy="1051560"/>
+            <a:off x="640080" y="4777232"/>
+            <a:ext cx="8046720" cy="1486408"/>
           </a:xfrm>
           <a:prstGeom prst="rect">
             <a:avLst/>
@@ -4737,7 +4714,7 @@
           <a:p>
             <a:pPr algn="l" indent="0" marL="0">
               <a:lnSpc>
-                <a:spcPts val="2400"/>
+                <a:spcPts val="3120"/>
               </a:lnSpc>
               <a:spcAft>
                 <a:spcPts val="1010"/>
@@ -4745,7 +4722,7 @@
               <a:buNone/>
             </a:pPr>
             <a:r>
-              <a:rPr lang="en-US" sz="2000" dirty="0">
+              <a:rPr lang="en-US" sz="2600" dirty="0">
                 <a:solidFill>
                   <a:srgbClr val="111111"/>
                 </a:solidFill>
@@ -4755,12 +4732,12 @@
               </a:rPr>
               <a:t>Predict how many of the 1513 sales are unusually large by that rule.</a:t>
             </a:r>
-            <a:endParaRPr lang="en-US" sz="2000" dirty="0"/>
-          </a:p>
-          <a:p>
-            <a:pPr algn="l" indent="0" marL="0">
-              <a:lnSpc>
-                <a:spcPts val="2400"/>
+            <a:endParaRPr lang="en-US" sz="2600" dirty="0"/>
+          </a:p>
+          <a:p>
+            <a:pPr algn="l" indent="0" marL="0">
+              <a:lnSpc>
+                <a:spcPts val="3120"/>
               </a:lnSpc>
               <a:spcAft>
                 <a:spcPts val="1010"/>
@@ -4768,7 +4745,7 @@
               <a:buNone/>
             </a:pPr>
             <a:r>
-              <a:rPr lang="en-US" sz="2000" dirty="0">
+              <a:rPr lang="en-US" sz="2600" dirty="0">
                 <a:solidFill>
                   <a:srgbClr val="111111"/>
                 </a:solidFill>
@@ -4778,7 +4755,7 @@
               </a:rPr>
               <a:t>Write your guess on paper before we run it.</a:t>
             </a:r>
-            <a:endParaRPr lang="en-US" sz="2000" dirty="0"/>
+            <a:endParaRPr lang="en-US" sz="2600" dirty="0"/>
           </a:p>
         </p:txBody>
       </p:sp>
@@ -4798,7 +4775,7 @@
         </p:blipFill>
         <p:spPr>
           <a:xfrm>
-            <a:off x="10241280" y="5214366"/>
+            <a:off x="10241280" y="5031486"/>
             <a:ext cx="1188720" cy="1046988"/>
           </a:xfrm>
           <a:prstGeom prst="rect">
@@ -5531,438 +5508,30 @@
           </a:p>
         </p:txBody>
       </p:sp>
-      <p:sp>
-        <p:nvSpPr>
-          <p:cNvPr id="4" name="Shape 2"/>
-          <p:cNvSpPr/>
+      <p:pic>
+        <p:nvPicPr>
+          <p:cNvPr id="4" name="Image 0" descr="Change one thing">    </p:cNvPr>
+          <p:cNvPicPr>
+            <a:picLocks noChangeAspect="1"/>
+          </p:cNvPicPr>
           <p:nvPr/>
-        </p:nvSpPr>
-        <p:spPr>
-          <a:xfrm>
-            <a:off x="7223760" y="1737360"/>
-            <a:ext cx="4297680" cy="4137152"/>
-          </a:xfrm>
-          <a:prstGeom prst="roundRect">
-            <a:avLst>
-              <a:gd name="adj" fmla="val 1768"/>
-            </a:avLst>
-          </a:prstGeom>
-          <a:solidFill>
-            <a:srgbClr val="111111"/>
-          </a:solidFill>
-          <a:ln/>
-        </p:spPr>
-      </p:sp>
-      <p:sp>
-        <p:nvSpPr>
-          <p:cNvPr id="5" name="Text 3"/>
-          <p:cNvSpPr txBox="1"/>
-          <p:nvPr/>
-        </p:nvSpPr>
-        <p:spPr>
-          <a:xfrm>
-            <a:off x="7424928" y="1938528"/>
-            <a:ext cx="3895344" cy="3734816"/>
-          </a:xfrm>
-          <a:prstGeom prst="rect">
-            <a:avLst/>
-          </a:prstGeom>
-          <a:noFill/>
-          <a:ln/>
-        </p:spPr>
-        <p:txBody>
-          <a:bodyPr wrap="square" lIns="0" tIns="0" rIns="0" bIns="0" rtlCol="0" anchor="t"/>
-          <a:lstStyle/>
-          <a:p>
-            <a:pPr algn="l" indent="0" marL="0">
-              <a:lnSpc>
-                <a:spcPts val="1820"/>
-              </a:lnSpc>
-              <a:buNone/>
-            </a:pPr>
-            <a:r>
-              <a:rPr lang="en-US" sz="1400" dirty="0">
-                <a:solidFill>
-                  <a:srgbClr val="FFFFFF"/>
-                </a:solidFill>
-                <a:latin typeface="Courier New" pitchFamily="34" charset="0"/>
-                <a:ea typeface="Courier New" pitchFamily="34" charset="-122"/>
-                <a:cs typeface="Courier New" pitchFamily="34" charset="-120"/>
-              </a:rPr>
-              <a:t>sunrise = pd.read_csv(</a:t>
-            </a:r>
-            <a:endParaRPr lang="en-US" sz="1400" dirty="0"/>
-          </a:p>
-          <a:p>
-            <a:pPr algn="l" indent="0" marL="0">
-              <a:lnSpc>
-                <a:spcPts val="1820"/>
-              </a:lnSpc>
-              <a:buNone/>
-            </a:pPr>
-            <a:r>
-              <a:rPr lang="en-US" sz="1400" dirty="0">
-                <a:solidFill>
-                  <a:srgbClr val="FFFFFF"/>
-                </a:solidFill>
-                <a:latin typeface="Courier New" pitchFamily="34" charset="0"/>
-                <a:ea typeface="Courier New" pitchFamily="34" charset="-122"/>
-                <a:cs typeface="Courier New" pitchFamily="34" charset="-120"/>
-              </a:rPr>
-              <a:t>    </a:t>
-            </a:r>
-            <a:pPr algn="l" indent="0" marL="0">
-              <a:lnSpc>
-                <a:spcPts val="1820"/>
-              </a:lnSpc>
-              <a:buNone/>
-            </a:pPr>
-            <a:r>
-              <a:rPr lang="en-US" sz="1400" dirty="0">
-                <a:solidFill>
-                  <a:srgbClr val="E0BE36"/>
-                </a:solidFill>
-                <a:latin typeface="Courier New" pitchFamily="34" charset="0"/>
-                <a:ea typeface="Courier New" pitchFamily="34" charset="-122"/>
-                <a:cs typeface="Courier New" pitchFamily="34" charset="-120"/>
-              </a:rPr>
-              <a:t>"sunrise_sales.csv"</a:t>
-            </a:r>
-            <a:endParaRPr lang="en-US" sz="1400" dirty="0"/>
-          </a:p>
-          <a:p>
-            <a:pPr algn="l" indent="0" marL="0">
-              <a:lnSpc>
-                <a:spcPts val="1820"/>
-              </a:lnSpc>
-              <a:buNone/>
-            </a:pPr>
-            <a:r>
-              <a:rPr lang="en-US" sz="1400" dirty="0">
-                <a:solidFill>
-                  <a:srgbClr val="FFFFFF"/>
-                </a:solidFill>
-                <a:latin typeface="Courier New" pitchFamily="34" charset="0"/>
-                <a:ea typeface="Courier New" pitchFamily="34" charset="-122"/>
-                <a:cs typeface="Courier New" pitchFamily="34" charset="-120"/>
-              </a:rPr>
-              <a:t>)</a:t>
-            </a:r>
-            <a:endParaRPr lang="en-US" sz="1400" dirty="0"/>
-          </a:p>
-          <a:p>
-            <a:pPr algn="l" indent="0" marL="0">
-              <a:lnSpc>
-                <a:spcPts val="1820"/>
-              </a:lnSpc>
-              <a:buNone/>
-            </a:pPr>
-            <a:r>
-              <a:rPr lang="en-US" sz="1400" dirty="0">
-                <a:solidFill>
-                  <a:srgbClr val="FFFFFF"/>
-                </a:solidFill>
-                <a:latin typeface="Courier New" pitchFamily="34" charset="0"/>
-                <a:ea typeface="Courier New" pitchFamily="34" charset="-122"/>
-                <a:cs typeface="Courier New" pitchFamily="34" charset="-120"/>
-              </a:rPr>
-              <a:t>values = (</a:t>
-            </a:r>
-            <a:endParaRPr lang="en-US" sz="1400" dirty="0"/>
-          </a:p>
-          <a:p>
-            <a:pPr algn="l" indent="0" marL="0">
-              <a:lnSpc>
-                <a:spcPts val="1820"/>
-              </a:lnSpc>
-              <a:buNone/>
-            </a:pPr>
-            <a:r>
-              <a:rPr lang="en-US" sz="1400" dirty="0">
-                <a:solidFill>
-                  <a:srgbClr val="FFFFFF"/>
-                </a:solidFill>
-                <a:latin typeface="Courier New" pitchFamily="34" charset="0"/>
-                <a:ea typeface="Courier New" pitchFamily="34" charset="-122"/>
-                <a:cs typeface="Courier New" pitchFamily="34" charset="-120"/>
-              </a:rPr>
-              <a:t>    sunrise[</a:t>
-            </a:r>
-            <a:pPr algn="l" indent="0" marL="0">
-              <a:lnSpc>
-                <a:spcPts val="1820"/>
-              </a:lnSpc>
-              <a:buNone/>
-            </a:pPr>
-            <a:r>
-              <a:rPr lang="en-US" sz="1400" dirty="0">
-                <a:solidFill>
-                  <a:srgbClr val="E0BE36"/>
-                </a:solidFill>
-                <a:latin typeface="Courier New" pitchFamily="34" charset="0"/>
-                <a:ea typeface="Courier New" pitchFamily="34" charset="-122"/>
-                <a:cs typeface="Courier New" pitchFamily="34" charset="-120"/>
-              </a:rPr>
-              <a:t>"units"</a:t>
-            </a:r>
-            <a:pPr algn="l" indent="0" marL="0">
-              <a:lnSpc>
-                <a:spcPts val="1820"/>
-              </a:lnSpc>
-              <a:buNone/>
-            </a:pPr>
-            <a:r>
-              <a:rPr lang="en-US" sz="1400" dirty="0">
-                <a:solidFill>
-                  <a:srgbClr val="FFFFFF"/>
-                </a:solidFill>
-                <a:latin typeface="Courier New" pitchFamily="34" charset="0"/>
-                <a:ea typeface="Courier New" pitchFamily="34" charset="-122"/>
-                <a:cs typeface="Courier New" pitchFamily="34" charset="-120"/>
-              </a:rPr>
-              <a:t>] * sunrise[</a:t>
-            </a:r>
-            <a:endParaRPr lang="en-US" sz="1400" dirty="0"/>
-          </a:p>
-          <a:p>
-            <a:pPr algn="l" indent="0" marL="0">
-              <a:lnSpc>
-                <a:spcPts val="1820"/>
-              </a:lnSpc>
-              <a:buNone/>
-            </a:pPr>
-            <a:r>
-              <a:rPr lang="en-US" sz="1400" dirty="0">
-                <a:solidFill>
-                  <a:srgbClr val="FFFFFF"/>
-                </a:solidFill>
-                <a:latin typeface="Courier New" pitchFamily="34" charset="0"/>
-                <a:ea typeface="Courier New" pitchFamily="34" charset="-122"/>
-                <a:cs typeface="Courier New" pitchFamily="34" charset="-120"/>
-              </a:rPr>
-              <a:t>        </a:t>
-            </a:r>
-            <a:pPr algn="l" indent="0" marL="0">
-              <a:lnSpc>
-                <a:spcPts val="1820"/>
-              </a:lnSpc>
-              <a:buNone/>
-            </a:pPr>
-            <a:r>
-              <a:rPr lang="en-US" sz="1400" dirty="0">
-                <a:solidFill>
-                  <a:srgbClr val="E0BE36"/>
-                </a:solidFill>
-                <a:latin typeface="Courier New" pitchFamily="34" charset="0"/>
-                <a:ea typeface="Courier New" pitchFamily="34" charset="-122"/>
-                <a:cs typeface="Courier New" pitchFamily="34" charset="-120"/>
-              </a:rPr>
-              <a:t>"unit_price_ugx"</a:t>
-            </a:r>
-            <a:endParaRPr lang="en-US" sz="1400" dirty="0"/>
-          </a:p>
-          <a:p>
-            <a:pPr algn="l" indent="0" marL="0">
-              <a:lnSpc>
-                <a:spcPts val="1820"/>
-              </a:lnSpc>
-              <a:buNone/>
-            </a:pPr>
-            <a:r>
-              <a:rPr lang="en-US" sz="1400" dirty="0">
-                <a:solidFill>
-                  <a:srgbClr val="FFFFFF"/>
-                </a:solidFill>
-                <a:latin typeface="Courier New" pitchFamily="34" charset="0"/>
-                <a:ea typeface="Courier New" pitchFamily="34" charset="-122"/>
-                <a:cs typeface="Courier New" pitchFamily="34" charset="-120"/>
-              </a:rPr>
-              <a:t>    ]</a:t>
-            </a:r>
-            <a:endParaRPr lang="en-US" sz="1400" dirty="0"/>
-          </a:p>
-          <a:p>
-            <a:pPr algn="l" indent="0" marL="0">
-              <a:lnSpc>
-                <a:spcPts val="1820"/>
-              </a:lnSpc>
-              <a:buNone/>
-            </a:pPr>
-            <a:r>
-              <a:rPr lang="en-US" sz="1400" dirty="0">
-                <a:solidFill>
-                  <a:srgbClr val="FFFFFF"/>
-                </a:solidFill>
-                <a:latin typeface="Courier New" pitchFamily="34" charset="0"/>
-                <a:ea typeface="Courier New" pitchFamily="34" charset="-122"/>
-                <a:cs typeface="Courier New" pitchFamily="34" charset="-120"/>
-              </a:rPr>
-              <a:t>).to_numpy()</a:t>
-            </a:r>
-            <a:endParaRPr lang="en-US" sz="1400" dirty="0"/>
-          </a:p>
-          <a:p>
-            <a:pPr algn="l" indent="0" marL="0">
-              <a:lnSpc>
-                <a:spcPts val="1820"/>
-              </a:lnSpc>
-              <a:buNone/>
-            </a:pPr>
-            <a:r>
-              <a:rPr lang="en-US" sz="1400" dirty="0">
-                <a:solidFill>
-                  <a:srgbClr val="FFFFFF"/>
-                </a:solidFill>
-                <a:latin typeface="Courier New" pitchFamily="34" charset="0"/>
-                <a:ea typeface="Courier New" pitchFamily="34" charset="-122"/>
-                <a:cs typeface="Courier New" pitchFamily="34" charset="-120"/>
-              </a:rPr>
-              <a:t>q1, q3 = np.percentile(</a:t>
-            </a:r>
-            <a:endParaRPr lang="en-US" sz="1400" dirty="0"/>
-          </a:p>
-          <a:p>
-            <a:pPr algn="l" indent="0" marL="0">
-              <a:lnSpc>
-                <a:spcPts val="1820"/>
-              </a:lnSpc>
-              <a:buNone/>
-            </a:pPr>
-            <a:r>
-              <a:rPr lang="en-US" sz="1400" dirty="0">
-                <a:solidFill>
-                  <a:srgbClr val="FFFFFF"/>
-                </a:solidFill>
-                <a:latin typeface="Courier New" pitchFamily="34" charset="0"/>
-                <a:ea typeface="Courier New" pitchFamily="34" charset="-122"/>
-                <a:cs typeface="Courier New" pitchFamily="34" charset="-120"/>
-              </a:rPr>
-              <a:t>    values, [25, 75]</a:t>
-            </a:r>
-            <a:endParaRPr lang="en-US" sz="1400" dirty="0"/>
-          </a:p>
-          <a:p>
-            <a:pPr algn="l" indent="0" marL="0">
-              <a:lnSpc>
-                <a:spcPts val="1820"/>
-              </a:lnSpc>
-              <a:buNone/>
-            </a:pPr>
-            <a:r>
-              <a:rPr lang="en-US" sz="1400" dirty="0">
-                <a:solidFill>
-                  <a:srgbClr val="FFFFFF"/>
-                </a:solidFill>
-                <a:latin typeface="Courier New" pitchFamily="34" charset="0"/>
-                <a:ea typeface="Courier New" pitchFamily="34" charset="-122"/>
-                <a:cs typeface="Courier New" pitchFamily="34" charset="-120"/>
-              </a:rPr>
-              <a:t>)</a:t>
-            </a:r>
-            <a:endParaRPr lang="en-US" sz="1400" dirty="0"/>
-          </a:p>
-          <a:p>
-            <a:pPr algn="l" indent="0" marL="0">
-              <a:lnSpc>
-                <a:spcPts val="1820"/>
-              </a:lnSpc>
-              <a:buNone/>
-            </a:pPr>
-            <a:r>
-              <a:rPr lang="en-US" sz="1400" dirty="0">
-                <a:solidFill>
-                  <a:srgbClr val="FFFFFF"/>
-                </a:solidFill>
-                <a:latin typeface="Courier New" pitchFamily="34" charset="0"/>
-                <a:ea typeface="Courier New" pitchFamily="34" charset="-122"/>
-                <a:cs typeface="Courier New" pitchFamily="34" charset="-120"/>
-              </a:rPr>
-              <a:t>fence = q3 + 1.5 * (q3 - q1)</a:t>
-            </a:r>
-            <a:endParaRPr lang="en-US" sz="1400" dirty="0"/>
-          </a:p>
-          <a:p>
-            <a:pPr algn="l" indent="0" marL="0">
-              <a:lnSpc>
-                <a:spcPts val="1820"/>
-              </a:lnSpc>
-              <a:buNone/>
-            </a:pPr>
-            <a:r>
-              <a:rPr lang="en-US" sz="1400" dirty="0">
-                <a:solidFill>
-                  <a:srgbClr val="FFFFFF"/>
-                </a:solidFill>
-                <a:latin typeface="Courier New" pitchFamily="34" charset="0"/>
-                <a:ea typeface="Courier New" pitchFamily="34" charset="-122"/>
-                <a:cs typeface="Courier New" pitchFamily="34" charset="-120"/>
-              </a:rPr>
-              <a:t>big = values[values &gt; fence]</a:t>
-            </a:r>
-            <a:endParaRPr lang="en-US" sz="1400" dirty="0"/>
-          </a:p>
-          <a:p>
-            <a:pPr algn="l" indent="0" marL="0">
-              <a:lnSpc>
-                <a:spcPts val="1820"/>
-              </a:lnSpc>
-              <a:buNone/>
-            </a:pPr>
-            <a:r>
-              <a:rPr lang="en-US" sz="1400" dirty="0">
-                <a:solidFill>
-                  <a:srgbClr val="FFFFFF"/>
-                </a:solidFill>
-                <a:latin typeface="Courier New" pitchFamily="34" charset="0"/>
-                <a:ea typeface="Courier New" pitchFamily="34" charset="-122"/>
-                <a:cs typeface="Courier New" pitchFamily="34" charset="-120"/>
-              </a:rPr>
-              <a:t>print(q1, q3, fence)</a:t>
-            </a:r>
-            <a:endParaRPr lang="en-US" sz="1400" dirty="0"/>
-          </a:p>
-          <a:p>
-            <a:pPr algn="l" indent="0" marL="0">
-              <a:lnSpc>
-                <a:spcPts val="1820"/>
-              </a:lnSpc>
-              <a:buNone/>
-            </a:pPr>
-            <a:r>
-              <a:rPr lang="en-US" sz="1400" dirty="0">
-                <a:solidFill>
-                  <a:srgbClr val="FFFFFF"/>
-                </a:solidFill>
-                <a:latin typeface="Courier New" pitchFamily="34" charset="0"/>
-                <a:ea typeface="Courier New" pitchFamily="34" charset="-122"/>
-                <a:cs typeface="Courier New" pitchFamily="34" charset="-120"/>
-              </a:rPr>
-              <a:t>print(len(big), big.max())</a:t>
-            </a:r>
-            <a:endParaRPr lang="en-US" sz="1400" dirty="0"/>
-          </a:p>
-          <a:p>
-            <a:pPr algn="l" indent="0" marL="0">
-              <a:lnSpc>
-                <a:spcPts val="1820"/>
-              </a:lnSpc>
-              <a:buNone/>
-            </a:pPr>
-            <a:r>
-              <a:rPr lang="en-US" sz="1400" dirty="0">
-                <a:solidFill>
-                  <a:srgbClr val="FFFFFF"/>
-                </a:solidFill>
-                <a:latin typeface="Courier New" pitchFamily="34" charset="0"/>
-                <a:ea typeface="Courier New" pitchFamily="34" charset="-122"/>
-                <a:cs typeface="Courier New" pitchFamily="34" charset="-120"/>
-              </a:rPr>
-              <a:t>print(round(np.std(customers), 1))</a:t>
-            </a:r>
-            <a:endParaRPr lang="en-US" sz="1400" dirty="0"/>
-          </a:p>
-        </p:txBody>
-      </p:sp>
+        </p:nvPicPr>
+        <p:blipFill>
+          <a:blip r:embed="rId1"/>
+          <a:stretch>
+            <a:fillRect/>
+          </a:stretch>
+        </p:blipFill>
+        <p:spPr>
+          <a:xfrm>
+            <a:off x="9418320" y="2103120"/>
+            <a:ext cx="1828800" cy="1828800"/>
+          </a:xfrm>
+          <a:prstGeom prst="rect">
+            <a:avLst/>
+          </a:prstGeom>
+        </p:spPr>
+      </p:pic>
       <p:sp>
         <p:nvSpPr>
           <p:cNvPr id="25" name="Slide Number Placeholder 0"/>
@@ -6435,15 +6004,15 @@
           <a:p>
             <a:pPr algn="l" indent="0" marL="0">
               <a:lnSpc>
-                <a:spcPts val="3480"/>
+                <a:spcPts val="3120"/>
               </a:lnSpc>
               <a:spcAft>
-                <a:spcPts val="2520"/>
+                <a:spcPts val="2020"/>
               </a:spcAft>
               <a:buNone/>
             </a:pPr>
             <a:r>
-              <a:rPr lang="en-US" sz="2900" dirty="0">
+              <a:rPr lang="en-US" sz="2600" dirty="0">
                 <a:solidFill>
                   <a:srgbClr val="111111"/>
                 </a:solidFill>
@@ -6451,22 +6020,22 @@
                 <a:ea typeface="Lato" pitchFamily="34" charset="-122"/>
                 <a:cs typeface="Lato" pitchFamily="34" charset="-120"/>
               </a:rPr>
-              <a:t>Take the revenue_ugx column of the daily summary as a NumPy array. Find its mean, median and the 25th and 75th percentiles with NumPy. Then find the same four numbers with pandas and check that the two routes agree.</a:t>
-            </a:r>
-            <a:endParaRPr lang="en-US" sz="2900" dirty="0"/>
-          </a:p>
-          <a:p>
-            <a:pPr algn="l" indent="0" marL="0">
-              <a:lnSpc>
-                <a:spcPts val="3480"/>
+              <a:t>Take the revenue_ugx column of the daily summary as a NumPy array.</a:t>
+            </a:r>
+            <a:endParaRPr lang="en-US" sz="2600" dirty="0"/>
+          </a:p>
+          <a:p>
+            <a:pPr algn="l" indent="0" marL="0">
+              <a:lnSpc>
+                <a:spcPts val="3120"/>
               </a:lnSpc>
               <a:spcAft>
-                <a:spcPts val="2520"/>
+                <a:spcPts val="2020"/>
               </a:spcAft>
               <a:buNone/>
             </a:pPr>
             <a:r>
-              <a:rPr lang="en-US" sz="2900" dirty="0">
+              <a:rPr lang="en-US" sz="2600" dirty="0">
                 <a:solidFill>
                   <a:srgbClr val="111111"/>
                 </a:solidFill>
@@ -6474,9 +6043,55 @@
                 <a:ea typeface="Lato" pitchFamily="34" charset="-122"/>
                 <a:cs typeface="Lato" pitchFamily="34" charset="-120"/>
               </a:rPr>
+              <a:t>Find its mean, median and the 25th and 75th percentiles with NumPy.</a:t>
+            </a:r>
+            <a:endParaRPr lang="en-US" sz="2600" dirty="0"/>
+          </a:p>
+          <a:p>
+            <a:pPr algn="l" indent="0" marL="0">
+              <a:lnSpc>
+                <a:spcPts val="3120"/>
+              </a:lnSpc>
+              <a:spcAft>
+                <a:spcPts val="2020"/>
+              </a:spcAft>
+              <a:buNone/>
+            </a:pPr>
+            <a:r>
+              <a:rPr lang="en-US" sz="2600" dirty="0">
+                <a:solidFill>
+                  <a:srgbClr val="111111"/>
+                </a:solidFill>
+                <a:latin typeface="Lato" pitchFamily="34" charset="0"/>
+                <a:ea typeface="Lato" pitchFamily="34" charset="-122"/>
+                <a:cs typeface="Lato" pitchFamily="34" charset="-120"/>
+              </a:rPr>
+              <a:t>Then find the same four numbers with pandas and check that the two routes agree.</a:t>
+            </a:r>
+            <a:endParaRPr lang="en-US" sz="2600" dirty="0"/>
+          </a:p>
+          <a:p>
+            <a:pPr algn="l" indent="0" marL="0">
+              <a:lnSpc>
+                <a:spcPts val="3120"/>
+              </a:lnSpc>
+              <a:spcAft>
+                <a:spcPts val="2020"/>
+              </a:spcAft>
+              <a:buNone/>
+            </a:pPr>
+            <a:r>
+              <a:rPr lang="en-US" sz="2600" dirty="0">
+                <a:solidFill>
+                  <a:srgbClr val="111111"/>
+                </a:solidFill>
+                <a:latin typeface="Lato" pitchFamily="34" charset="0"/>
+                <a:ea typeface="Lato" pitchFamily="34" charset="-122"/>
+                <a:cs typeface="Lato" pitchFamily="34" charset="-120"/>
+              </a:rPr>
               <a:t>Save it as DA13. Write two sentences: what you changed and how you checked it.</a:t>
             </a:r>
-            <a:endParaRPr lang="en-US" sz="2900" dirty="0"/>
+            <a:endParaRPr lang="en-US" sz="2600" dirty="0"/>
           </a:p>
         </p:txBody>
       </p:sp>
